--- a/s02_2026-10-13/geo0160_Data_Models_Formats.pptx
+++ b/s02_2026-10-13/geo0160_Data_Models_Formats.pptx
@@ -4753,7 +4753,7 @@
         </p:nvGraphicFramePr>
         <p:xfrm>
           <a:off x="548640" y="1280160"/>
-          <a:ext cx="6583680" cy="3017520"/>
+          <a:ext cx="6583680" cy="3291840"/>
         </p:xfrm>
         <a:graphic>
           <a:graphicData uri="http://schemas.openxmlformats.org/drawingml/2006/table">
@@ -4762,18 +4762,18 @@
                 <a:tableStyleId>{5C22544A-7EE6-4342-B048-85BDC9FD1C3A}</a:tableStyleId>
               </a:tblPr>
               <a:tblGrid>
-                <a:gridCol w="1554480"/>
-                <a:gridCol w="3291840"/>
                 <a:gridCol w="1737360"/>
+                <a:gridCol w="3017520"/>
+                <a:gridCol w="1828800"/>
               </a:tblGrid>
-              <a:tr h="502920">
+              <a:tr h="548640">
                 <a:tc>
                   <a:txBody>
                     <a:bodyPr wrap="square"/>
                     <a:lstStyle/>
                     <a:p>
                       <a:r>
-                        <a:rPr sz="1300" b="1">
+                        <a:rPr sz="1600" b="1">
                           <a:solidFill>
                             <a:srgbClr val="FFFFFF"/>
                           </a:solidFill>
@@ -4794,7 +4794,7 @@
                     <a:lstStyle/>
                     <a:p>
                       <a:r>
-                        <a:rPr sz="1300" b="1">
+                        <a:rPr sz="1600" b="1">
                           <a:solidFill>
                             <a:srgbClr val="FFFFFF"/>
                           </a:solidFill>
@@ -4815,7 +4815,7 @@
                     <a:lstStyle/>
                     <a:p>
                       <a:r>
-                        <a:rPr sz="1300" b="1">
+                        <a:rPr sz="1600" b="1">
                           <a:solidFill>
                             <a:srgbClr val="FFFFFF"/>
                           </a:solidFill>
@@ -4831,14 +4831,14 @@
                   </a:tcPr>
                 </a:tc>
               </a:tr>
-              <a:tr h="502920">
+              <a:tr h="548640">
                 <a:tc>
                   <a:txBody>
                     <a:bodyPr wrap="square"/>
                     <a:lstStyle/>
                     <a:p>
                       <a:r>
-                        <a:rPr sz="1300" b="1">
+                        <a:rPr sz="1600" b="1">
                           <a:solidFill>
                             <a:srgbClr val="2C3E50"/>
                           </a:solidFill>
@@ -4859,7 +4859,7 @@
                     <a:lstStyle/>
                     <a:p>
                       <a:r>
-                        <a:rPr sz="1300" b="0">
+                        <a:rPr sz="1600" b="0">
                           <a:solidFill>
                             <a:srgbClr val="2C3E50"/>
                           </a:solidFill>
@@ -4880,7 +4880,7 @@
                     <a:lstStyle/>
                     <a:p>
                       <a:r>
-                        <a:rPr sz="1300" b="0">
+                        <a:rPr sz="1600" b="0">
                           <a:solidFill>
                             <a:srgbClr val="2C3E50"/>
                           </a:solidFill>
@@ -4896,14 +4896,14 @@
                   </a:tcPr>
                 </a:tc>
               </a:tr>
-              <a:tr h="502920">
+              <a:tr h="548640">
                 <a:tc>
                   <a:txBody>
                     <a:bodyPr wrap="square"/>
                     <a:lstStyle/>
                     <a:p>
                       <a:r>
-                        <a:rPr sz="1300" b="1">
+                        <a:rPr sz="1600" b="1">
                           <a:solidFill>
                             <a:srgbClr val="2C3E50"/>
                           </a:solidFill>
@@ -4924,7 +4924,7 @@
                     <a:lstStyle/>
                     <a:p>
                       <a:r>
-                        <a:rPr sz="1300" b="0">
+                        <a:rPr sz="1600" b="0">
                           <a:solidFill>
                             <a:srgbClr val="2C3E50"/>
                           </a:solidFill>
@@ -4945,7 +4945,7 @@
                     <a:lstStyle/>
                     <a:p>
                       <a:r>
-                        <a:rPr sz="1300" b="0">
+                        <a:rPr sz="1600" b="0">
                           <a:solidFill>
                             <a:srgbClr val="2C3E50"/>
                           </a:solidFill>
@@ -4961,14 +4961,14 @@
                   </a:tcPr>
                 </a:tc>
               </a:tr>
-              <a:tr h="502920">
+              <a:tr h="548640">
                 <a:tc>
                   <a:txBody>
                     <a:bodyPr wrap="square"/>
                     <a:lstStyle/>
                     <a:p>
                       <a:r>
-                        <a:rPr sz="1300" b="1">
+                        <a:rPr sz="1600" b="1">
                           <a:solidFill>
                             <a:srgbClr val="2C3E50"/>
                           </a:solidFill>
@@ -4989,7 +4989,7 @@
                     <a:lstStyle/>
                     <a:p>
                       <a:r>
-                        <a:rPr sz="1300" b="0">
+                        <a:rPr sz="1600" b="0">
                           <a:solidFill>
                             <a:srgbClr val="2C3E50"/>
                           </a:solidFill>
@@ -5010,7 +5010,7 @@
                     <a:lstStyle/>
                     <a:p>
                       <a:r>
-                        <a:rPr sz="1300" b="0">
+                        <a:rPr sz="1600" b="0">
                           <a:solidFill>
                             <a:srgbClr val="2C3E50"/>
                           </a:solidFill>
@@ -5026,14 +5026,14 @@
                   </a:tcPr>
                 </a:tc>
               </a:tr>
-              <a:tr h="502920">
+              <a:tr h="548640">
                 <a:tc>
                   <a:txBody>
                     <a:bodyPr wrap="square"/>
                     <a:lstStyle/>
                     <a:p>
                       <a:r>
-                        <a:rPr sz="1300" b="1">
+                        <a:rPr sz="1600" b="1">
                           <a:solidFill>
                             <a:srgbClr val="2C3E50"/>
                           </a:solidFill>
@@ -5054,7 +5054,7 @@
                     <a:lstStyle/>
                     <a:p>
                       <a:r>
-                        <a:rPr sz="1300" b="0">
+                        <a:rPr sz="1600" b="0">
                           <a:solidFill>
                             <a:srgbClr val="2C3E50"/>
                           </a:solidFill>
@@ -5075,7 +5075,7 @@
                     <a:lstStyle/>
                     <a:p>
                       <a:r>
-                        <a:rPr sz="1300" b="0">
+                        <a:rPr sz="1600" b="0">
                           <a:solidFill>
                             <a:srgbClr val="2C3E50"/>
                           </a:solidFill>
@@ -5091,14 +5091,14 @@
                   </a:tcPr>
                 </a:tc>
               </a:tr>
-              <a:tr h="502920">
+              <a:tr h="548640">
                 <a:tc>
                   <a:txBody>
                     <a:bodyPr wrap="square"/>
                     <a:lstStyle/>
                     <a:p>
                       <a:r>
-                        <a:rPr sz="1300" b="1">
+                        <a:rPr sz="1600" b="1">
                           <a:solidFill>
                             <a:srgbClr val="2C3E50"/>
                           </a:solidFill>
@@ -5119,7 +5119,7 @@
                     <a:lstStyle/>
                     <a:p>
                       <a:r>
-                        <a:rPr sz="1300" b="0">
+                        <a:rPr sz="1600" b="0">
                           <a:solidFill>
                             <a:srgbClr val="2C3E50"/>
                           </a:solidFill>
@@ -5140,7 +5140,7 @@
                     <a:lstStyle/>
                     <a:p>
                       <a:r>
-                        <a:rPr sz="1300" b="0">
+                        <a:rPr sz="1600" b="0">
                           <a:solidFill>
                             <a:srgbClr val="2C3E50"/>
                           </a:solidFill>
@@ -5169,7 +5169,7 @@
         <p:spPr>
           <a:xfrm>
             <a:off x="7498079" y="1280160"/>
-            <a:ext cx="4114800" cy="2011680"/>
+            <a:ext cx="4114800" cy="1828800"/>
           </a:xfrm>
           <a:prstGeom prst="roundRect">
             <a:avLst/>
@@ -5202,7 +5202,7 @@
           <a:p>
             <a:pPr algn="ctr"/>
             <a:r>
-              <a:rPr sz="2400" b="1" i="0">
+              <a:rPr sz="2600" b="1" i="0">
                 <a:solidFill>
                   <a:srgbClr val="8E44AD"/>
                 </a:solidFill>
@@ -5213,12 +5213,12 @@
           <a:p>
             <a:pPr algn="ctr"/>
             <a:r>
-              <a:rPr sz="2100" b="0" i="1">
+              <a:rPr sz="1800" b="0" i="1">
                 <a:solidFill>
                   <a:srgbClr val="8E44AD"/>
                 </a:solidFill>
               </a:rPr>
-              <a:t>a key read as a number loses its leading zero: the join fails</a:t>
+              <a:t>a key read as a number loses its leading zero</a:t>
             </a:r>
           </a:p>
         </p:txBody>
@@ -5231,8 +5231,8 @@
         </p:nvSpPr>
         <p:spPr>
           <a:xfrm>
-            <a:off x="7498079" y="3520440"/>
-            <a:ext cx="4114800" cy="1920240"/>
+            <a:off x="7498079" y="3291840"/>
+            <a:ext cx="4114800" cy="2651760"/>
           </a:xfrm>
           <a:prstGeom prst="rect">
             <a:avLst/>
@@ -5265,7 +5265,7 @@
           <a:p>
             <a:pPr algn="l"/>
             <a:r>
-              <a:rPr sz="1400" b="1">
+              <a:rPr sz="1700" b="1">
                 <a:solidFill>
                   <a:srgbClr val="2980B9"/>
                 </a:solidFill>
@@ -5280,12 +5280,12 @@
               </a:spcBef>
             </a:pPr>
             <a:r>
-              <a:rPr sz="1300" b="0">
+              <a:rPr sz="1600" b="0">
                 <a:solidFill>
                   <a:srgbClr val="2C3E50"/>
                 </a:solidFill>
               </a:rPr>
-              <a:t>Layer Properties → Fields: name, type, length</a:t>
+              <a:t>Layer Properties → Fields</a:t>
             </a:r>
           </a:p>
           <a:p>
@@ -5295,12 +5295,12 @@
               </a:spcBef>
             </a:pPr>
             <a:r>
-              <a:rPr sz="1300" b="0">
+              <a:rPr sz="1600" b="0">
                 <a:solidFill>
                   <a:srgbClr val="2C3E50"/>
                 </a:solidFill>
               </a:rPr>
-              <a:t>Add Delimited Text Layer: uncheck ‘Detect field types’ for keys</a:t>
+              <a:t>CSV import: untick ‘Detect field types’ for keys</a:t>
             </a:r>
           </a:p>
           <a:p>
@@ -5310,12 +5310,12 @@
               </a:spcBef>
             </a:pPr>
             <a:r>
-              <a:rPr sz="1300" b="0">
+              <a:rPr sz="1600" b="0">
                 <a:solidFill>
                   <a:srgbClr val="2C3E50"/>
                 </a:solidFill>
               </a:rPr>
-              <a:t>Field Calculator: to_string(), to_int(), to_date()</a:t>
+              <a:t>Field Calculator: to_string(), to_int()</a:t>
             </a:r>
           </a:p>
         </p:txBody>
@@ -5469,8 +5469,8 @@
         </p:blipFill>
         <p:spPr>
           <a:xfrm>
-            <a:off x="548640" y="1617507"/>
-            <a:ext cx="11064239" cy="1428424"/>
+            <a:off x="548640" y="1406055"/>
+            <a:ext cx="11064240" cy="1485569"/>
           </a:xfrm>
           <a:prstGeom prst="rect">
             <a:avLst/>
@@ -5485,8 +5485,8 @@
         </p:nvSpPr>
         <p:spPr>
           <a:xfrm>
-            <a:off x="548640" y="3657600"/>
-            <a:ext cx="11064240" cy="1600200"/>
+            <a:off x="548640" y="3337560"/>
+            <a:ext cx="11064240" cy="2057400"/>
           </a:xfrm>
           <a:prstGeom prst="rect">
             <a:avLst/>
@@ -5523,7 +5523,7 @@
               </a:spcAft>
             </a:pPr>
             <a:r>
-              <a:rPr sz="1200" b="0">
+              <a:rPr sz="1500" b="0">
                 <a:solidFill>
                   <a:srgbClr val="2C3E50"/>
                 </a:solidFill>
@@ -5539,7 +5539,7 @@
               </a:spcAft>
             </a:pPr>
             <a:r>
-              <a:rPr sz="1200" b="0">
+              <a:rPr sz="1500" b="0">
                 <a:solidFill>
                   <a:srgbClr val="2C3E50"/>
                 </a:solidFill>
@@ -5555,7 +5555,7 @@
               </a:spcAft>
             </a:pPr>
             <a:r>
-              <a:rPr sz="1200" b="0">
+              <a:rPr sz="1500" b="0">
                 <a:solidFill>
                   <a:srgbClr val="2C3E50"/>
                 </a:solidFill>
@@ -5571,7 +5571,7 @@
               </a:spcAft>
             </a:pPr>
             <a:r>
-              <a:rPr sz="1200" b="0">
+              <a:rPr sz="1500" b="0">
                 <a:solidFill>
                   <a:srgbClr val="2C3E50"/>
                 </a:solidFill>
@@ -5587,7 +5587,7 @@
               </a:spcAft>
             </a:pPr>
             <a:r>
-              <a:rPr sz="1200" b="0">
+              <a:rPr sz="1500" b="0">
                 <a:solidFill>
                   <a:srgbClr val="2C3E50"/>
                 </a:solidFill>
@@ -5603,7 +5603,7 @@
               </a:spcAft>
             </a:pPr>
             <a:r>
-              <a:rPr sz="1200" b="0">
+              <a:rPr sz="1500" b="0">
                 <a:solidFill>
                   <a:srgbClr val="2C3E50"/>
                 </a:solidFill>
@@ -5619,13 +5619,13 @@
               </a:spcAft>
             </a:pPr>
             <a:r>
-              <a:rPr sz="1200" b="0">
+              <a:rPr sz="1500" b="0">
                 <a:solidFill>
                   <a:srgbClr val="2C3E50"/>
                 </a:solidFill>
                 <a:latin typeface="Courier New"/>
               </a:rPr>
-              <a:t>GEOMETRYCOLLECTION (POINT (0.5 2.5), LINESTRING (0 0, 2 1.5), POLYGON ((2.5 0.5, 4 0.5, 4 2, 2.5 0.5)))</a:t>
+              <a:t>GEOMETRYCOLLECTION (POINT (0.5 2.5), LINESTRING (0 0, 2 1.5), POLYGON ((3 1, 4 1, 4 2, 3 1)))</a:t>
             </a:r>
           </a:p>
         </p:txBody>
@@ -5638,8 +5638,8 @@
         </p:nvSpPr>
         <p:spPr>
           <a:xfrm>
-            <a:off x="548640" y="5577840"/>
-            <a:ext cx="11064240" cy="365760"/>
+            <a:off x="548640" y="5486400"/>
+            <a:ext cx="11064240" cy="457200"/>
           </a:xfrm>
           <a:prstGeom prst="rect">
             <a:avLst/>
@@ -5658,13 +5658,13 @@
               </a:spcAft>
             </a:pPr>
             <a:r>
-              <a:rPr sz="1200" b="0" i="0">
+              <a:rPr sz="1800" b="0" i="0">
                 <a:solidFill>
                   <a:srgbClr val="7F8C8D"/>
                 </a:solidFill>
                 <a:latin typeface="Courier New"/>
               </a:rPr>
-              <a:t>from shapely import wkt;  g = wkt.loads("POINT (2 2)");  g.wkt, g.wkb_hex, g.geom_type</a:t>
+              <a:t>g = shapely.wkt.loads("POINT (2 2)");  g.wkt, g.wkb_hex</a:t>
             </a:r>
           </a:p>
         </p:txBody>
@@ -5818,8 +5818,8 @@
         </p:blipFill>
         <p:spPr>
           <a:xfrm>
-            <a:off x="548640" y="1525099"/>
-            <a:ext cx="11064240" cy="2390480"/>
+            <a:off x="548640" y="1247772"/>
+            <a:ext cx="11064240" cy="2442214"/>
           </a:xfrm>
           <a:prstGeom prst="rect">
             <a:avLst/>
@@ -5834,8 +5834,8 @@
         </p:nvSpPr>
         <p:spPr>
           <a:xfrm>
-            <a:off x="548640" y="4343400"/>
-            <a:ext cx="5120640" cy="1645920"/>
+            <a:off x="548640" y="4023360"/>
+            <a:ext cx="5394960" cy="2011680"/>
           </a:xfrm>
           <a:prstGeom prst="rect">
             <a:avLst/>
@@ -5855,7 +5855,7 @@
               <a:buChar char="•"/>
             </a:pPr>
             <a:r>
-              <a:rPr sz="1500" b="0" i="0">
+              <a:rPr sz="1800" b="0" i="0">
                 <a:solidFill>
                   <a:srgbClr val="2C3E50"/>
                 </a:solidFill>
@@ -5871,12 +5871,12 @@
               <a:buChar char="•"/>
             </a:pPr>
             <a:r>
-              <a:rPr sz="1500" b="0" i="0">
+              <a:rPr sz="1800" b="0" i="0">
                 <a:solidFill>
                   <a:srgbClr val="2C3E50"/>
                 </a:solidFill>
               </a:rPr>
-              <a:t>Holes lie inside the shell and touch it in at most one point</a:t>
+              <a:t>Holes lie inside the shell, touching it in one point at most</a:t>
             </a:r>
           </a:p>
           <a:p>
@@ -5887,7 +5887,7 @@
               <a:buChar char="•"/>
             </a:pPr>
             <a:r>
-              <a:rPr sz="1500" b="0" i="0">
+              <a:rPr sz="1800" b="0" i="0">
                 <a:solidFill>
                   <a:srgbClr val="2C3E50"/>
                 </a:solidFill>
@@ -5905,8 +5905,8 @@
         </p:nvSpPr>
         <p:spPr>
           <a:xfrm>
-            <a:off x="5852160" y="4343400"/>
-            <a:ext cx="5760720" cy="1280160"/>
+            <a:off x="6126480" y="4023360"/>
+            <a:ext cx="5486400" cy="1645920"/>
           </a:xfrm>
           <a:prstGeom prst="rect">
             <a:avLst/>
@@ -5939,7 +5939,7 @@
           <a:p>
             <a:pPr algn="l"/>
             <a:r>
-              <a:rPr sz="1400" b="1">
+              <a:rPr sz="1700" b="1">
                 <a:solidFill>
                   <a:srgbClr val="2980B9"/>
                 </a:solidFill>
@@ -5954,12 +5954,12 @@
               </a:spcBef>
             </a:pPr>
             <a:r>
-              <a:rPr sz="1300" b="0">
+              <a:rPr sz="1600" b="0">
                 <a:solidFill>
                   <a:srgbClr val="2C3E50"/>
                 </a:solidFill>
               </a:rPr>
-              <a:t>Vector → Geometry Tools → Check Validity: lists the errors with their location</a:t>
+              <a:t>Vector → Geometry Tools → Check Validity</a:t>
             </a:r>
           </a:p>
           <a:p>
@@ -5969,12 +5969,12 @@
               </a:spcBef>
             </a:pPr>
             <a:r>
-              <a:rPr sz="1300" b="0">
+              <a:rPr sz="1600" b="0">
                 <a:solidFill>
                   <a:srgbClr val="2C3E50"/>
                 </a:solidFill>
               </a:rPr>
-              <a:t>Processing Toolbox → Fix geometries: repaired copy of the layer</a:t>
+              <a:t>Processing → Fix geometries</a:t>
             </a:r>
           </a:p>
         </p:txBody>
@@ -6128,8 +6128,8 @@
         </p:blipFill>
         <p:spPr>
           <a:xfrm>
-            <a:off x="548640" y="1394226"/>
-            <a:ext cx="11064239" cy="1920706"/>
+            <a:off x="548640" y="1325188"/>
+            <a:ext cx="11064240" cy="2013062"/>
           </a:xfrm>
           <a:prstGeom prst="rect">
             <a:avLst/>
@@ -6146,7 +6146,7 @@
         </p:nvGraphicFramePr>
         <p:xfrm>
           <a:off x="548640" y="3703320"/>
-          <a:ext cx="6035040" cy="2084832"/>
+          <a:ext cx="6217920" cy="2194560"/>
         </p:xfrm>
         <a:graphic>
           <a:graphicData uri="http://schemas.openxmlformats.org/drawingml/2006/table">
@@ -6155,17 +6155,17 @@
                 <a:tableStyleId>{5C22544A-7EE6-4342-B048-85BDC9FD1C3A}</a:tableStyleId>
               </a:tblPr>
               <a:tblGrid>
-                <a:gridCol w="2011680"/>
-                <a:gridCol w="4023360"/>
+                <a:gridCol w="2103120"/>
+                <a:gridCol w="4114800"/>
               </a:tblGrid>
-              <a:tr h="347472">
+              <a:tr h="365760">
                 <a:tc>
                   <a:txBody>
                     <a:bodyPr wrap="square"/>
                     <a:lstStyle/>
                     <a:p>
                       <a:r>
-                        <a:rPr sz="1300" b="1">
+                        <a:rPr sz="1600" b="1">
                           <a:solidFill>
                             <a:srgbClr val="FFFFFF"/>
                           </a:solidFill>
@@ -6186,7 +6186,7 @@
                     <a:lstStyle/>
                     <a:p>
                       <a:r>
-                        <a:rPr sz="1300" b="1">
+                        <a:rPr sz="1600" b="1">
                           <a:solidFill>
                             <a:srgbClr val="FFFFFF"/>
                           </a:solidFill>
@@ -6202,14 +6202,14 @@
                   </a:tcPr>
                 </a:tc>
               </a:tr>
-              <a:tr h="347472">
+              <a:tr h="365760">
                 <a:tc>
                   <a:txBody>
                     <a:bodyPr wrap="square"/>
                     <a:lstStyle/>
                     <a:p>
                       <a:r>
-                        <a:rPr sz="1300" b="0">
+                        <a:rPr sz="1600" b="0">
                           <a:solidFill>
                             <a:srgbClr val="2C3E50"/>
                           </a:solidFill>
@@ -6230,7 +6230,7 @@
                     <a:lstStyle/>
                     <a:p>
                       <a:r>
-                        <a:rPr sz="1300" b="0">
+                        <a:rPr sz="1600" b="0">
                           <a:solidFill>
                             <a:srgbClr val="2C3E50"/>
                           </a:solidFill>
@@ -6246,14 +6246,14 @@
                   </a:tcPr>
                 </a:tc>
               </a:tr>
-              <a:tr h="347472">
+              <a:tr h="365760">
                 <a:tc>
                   <a:txBody>
                     <a:bodyPr wrap="square"/>
                     <a:lstStyle/>
                     <a:p>
                       <a:r>
-                        <a:rPr sz="1300" b="0">
+                        <a:rPr sz="1600" b="0">
                           <a:solidFill>
                             <a:srgbClr val="2C3E50"/>
                           </a:solidFill>
@@ -6274,7 +6274,7 @@
                     <a:lstStyle/>
                     <a:p>
                       <a:r>
-                        <a:rPr sz="1300" b="0">
+                        <a:rPr sz="1600" b="0">
                           <a:solidFill>
                             <a:srgbClr val="2C3E50"/>
                           </a:solidFill>
@@ -6290,14 +6290,14 @@
                   </a:tcPr>
                 </a:tc>
               </a:tr>
-              <a:tr h="347472">
+              <a:tr h="365760">
                 <a:tc>
                   <a:txBody>
                     <a:bodyPr wrap="square"/>
                     <a:lstStyle/>
                     <a:p>
                       <a:r>
-                        <a:rPr sz="1300" b="0">
+                        <a:rPr sz="1600" b="0">
                           <a:solidFill>
                             <a:srgbClr val="2C3E50"/>
                           </a:solidFill>
@@ -6318,7 +6318,7 @@
                     <a:lstStyle/>
                     <a:p>
                       <a:r>
-                        <a:rPr sz="1300" b="0">
+                        <a:rPr sz="1600" b="0">
                           <a:solidFill>
                             <a:srgbClr val="2C3E50"/>
                           </a:solidFill>
@@ -6334,14 +6334,14 @@
                   </a:tcPr>
                 </a:tc>
               </a:tr>
-              <a:tr h="347472">
+              <a:tr h="365760">
                 <a:tc>
                   <a:txBody>
                     <a:bodyPr wrap="square"/>
                     <a:lstStyle/>
                     <a:p>
                       <a:r>
-                        <a:rPr sz="1300" b="0">
+                        <a:rPr sz="1600" b="0">
                           <a:solidFill>
                             <a:srgbClr val="2C3E50"/>
                           </a:solidFill>
@@ -6362,7 +6362,7 @@
                     <a:lstStyle/>
                     <a:p>
                       <a:r>
-                        <a:rPr sz="1300" b="0">
+                        <a:rPr sz="1600" b="0">
                           <a:solidFill>
                             <a:srgbClr val="2C3E50"/>
                           </a:solidFill>
@@ -6378,14 +6378,14 @@
                   </a:tcPr>
                 </a:tc>
               </a:tr>
-              <a:tr h="347472">
+              <a:tr h="365760">
                 <a:tc>
                   <a:txBody>
                     <a:bodyPr wrap="square"/>
                     <a:lstStyle/>
                     <a:p>
                       <a:r>
-                        <a:rPr sz="1300" b="0">
+                        <a:rPr sz="1600" b="0">
                           <a:solidFill>
                             <a:srgbClr val="2C3E50"/>
                           </a:solidFill>
@@ -6406,7 +6406,7 @@
                     <a:lstStyle/>
                     <a:p>
                       <a:r>
-                        <a:rPr sz="1300" b="0">
+                        <a:rPr sz="1600" b="0">
                           <a:solidFill>
                             <a:srgbClr val="2C3E50"/>
                           </a:solidFill>
@@ -6434,8 +6434,8 @@
         </p:nvSpPr>
         <p:spPr>
           <a:xfrm>
-            <a:off x="6812280" y="3703320"/>
-            <a:ext cx="4800600" cy="2103120"/>
+            <a:off x="6949440" y="3703320"/>
+            <a:ext cx="4663440" cy="2240280"/>
           </a:xfrm>
           <a:prstGeom prst="rect">
             <a:avLst/>
@@ -6468,7 +6468,7 @@
           <a:p>
             <a:pPr algn="l"/>
             <a:r>
-              <a:rPr sz="1400" b="1">
+              <a:rPr sz="1700" b="1">
                 <a:solidFill>
                   <a:srgbClr val="2980B9"/>
                 </a:solidFill>
@@ -6483,12 +6483,12 @@
               </a:spcBef>
             </a:pPr>
             <a:r>
-              <a:rPr sz="1300" b="0">
+              <a:rPr sz="1600" b="0">
                 <a:solidFill>
                   <a:srgbClr val="2C3E50"/>
                 </a:solidFill>
               </a:rPr>
-              <a:t>Vector → Research Tools → Select by Location</a:t>
+              <a:t>Vector → Research Tools →</a:t>
             </a:r>
           </a:p>
           <a:p>
@@ -6498,12 +6498,12 @@
               </a:spcBef>
             </a:pPr>
             <a:r>
-              <a:rPr sz="1300" b="0">
+              <a:rPr sz="1600" b="0">
                 <a:solidFill>
                   <a:srgbClr val="2C3E50"/>
                 </a:solidFill>
               </a:rPr>
-              <a:t>Processing → Join attributes by location (predicate: within, intersects, …)</a:t>
+              <a:t>   Select by Location</a:t>
             </a:r>
           </a:p>
           <a:p>
@@ -6513,12 +6513,27 @@
               </a:spcBef>
             </a:pPr>
             <a:r>
-              <a:rPr sz="1300" b="0">
+              <a:rPr sz="1600" b="0">
                 <a:solidFill>
                   <a:srgbClr val="2C3E50"/>
                 </a:solidFill>
               </a:rPr>
-              <a:t>Example: wells within groundwater bodies</a:t>
+              <a:t>Processing → Join attributes</a:t>
+            </a:r>
+          </a:p>
+          <a:p>
+            <a:pPr algn="l">
+              <a:spcBef>
+                <a:spcPts val="300"/>
+              </a:spcBef>
+            </a:pPr>
+            <a:r>
+              <a:rPr sz="1600" b="0">
+                <a:solidFill>
+                  <a:srgbClr val="2C3E50"/>
+                </a:solidFill>
+              </a:rPr>
+              <a:t>   by location (within, …)</a:t>
             </a:r>
           </a:p>
         </p:txBody>
@@ -6672,8 +6687,8 @@
         </p:blipFill>
         <p:spPr>
           <a:xfrm>
-            <a:off x="1642280" y="1143000"/>
-            <a:ext cx="3299118" cy="4480560"/>
+            <a:off x="1639356" y="1143000"/>
+            <a:ext cx="3304967" cy="4480560"/>
           </a:xfrm>
           <a:prstGeom prst="rect">
             <a:avLst/>
@@ -6696,8 +6711,8 @@
         </p:blipFill>
         <p:spPr>
           <a:xfrm>
-            <a:off x="7079685" y="1143000"/>
-            <a:ext cx="3579989" cy="4480560"/>
+            <a:off x="7073019" y="1143000"/>
+            <a:ext cx="3593320" cy="4480560"/>
           </a:xfrm>
           <a:prstGeom prst="rect">
             <a:avLst/>
@@ -6732,7 +6747,7 @@
               </a:spcAft>
             </a:pPr>
             <a:r>
-              <a:rPr sz="1400" b="1" i="0">
+              <a:rPr sz="1800" b="1" i="0">
                 <a:solidFill>
                   <a:srgbClr val="1B3A57"/>
                 </a:solidFill>
@@ -6740,12 +6755,12 @@
               <a:t>Vector stack: </a:t>
             </a:r>
             <a:r>
-              <a:rPr sz="1400" b="0" i="0">
+              <a:rPr sz="1800" b="0" i="0">
                 <a:solidFill>
                   <a:srgbClr val="2C3E50"/>
                 </a:solidFill>
               </a:rPr>
-              <a:t>overlay geometries (intersection, union, …)</a:t>
+              <a:t>overlay geometries</a:t>
             </a:r>
           </a:p>
         </p:txBody>
@@ -6778,7 +6793,7 @@
               </a:spcAft>
             </a:pPr>
             <a:r>
-              <a:rPr sz="1400" b="1" i="0">
+              <a:rPr sz="1800" b="1" i="0">
                 <a:solidFill>
                   <a:srgbClr val="1B3A57"/>
                 </a:solidFill>
@@ -6786,12 +6801,12 @@
               <a:t>Raster stack: </a:t>
             </a:r>
             <a:r>
-              <a:rPr sz="1400" b="0" i="0">
+              <a:rPr sz="1800" b="0" i="0">
                 <a:solidFill>
                   <a:srgbClr val="2C3E50"/>
                 </a:solidFill>
               </a:rPr>
-              <a:t>combine aligned cells (260 × 180 each)</a:t>
+              <a:t>combine aligned cells</a:t>
             </a:r>
           </a:p>
         </p:txBody>
@@ -6805,7 +6820,7 @@
         <p:spPr>
           <a:xfrm>
             <a:off x="548640" y="6053328"/>
-            <a:ext cx="10058400" cy="274320"/>
+            <a:ext cx="10607040" cy="274320"/>
           </a:xfrm>
           <a:prstGeom prst="rect">
             <a:avLst/>
@@ -6824,7 +6839,7 @@
               </a:spcAft>
             </a:pPr>
             <a:r>
-              <a:rPr sz="1000" b="0" i="0">
+              <a:rPr sz="1100" b="0" i="0">
                 <a:solidFill>
                   <a:srgbClr val="7F8C8D"/>
                 </a:solidFill>
@@ -7085,7 +7100,7 @@
               </a:spcAft>
             </a:pPr>
             <a:r>
-              <a:rPr sz="1600" b="0" i="0">
+              <a:rPr sz="1800" b="0" i="0">
                 <a:solidFill>
                   <a:srgbClr val="2C3E50"/>
                 </a:solidFill>
@@ -7213,7 +7228,7 @@
               </a:spcAft>
             </a:pPr>
             <a:r>
-              <a:rPr sz="1600" b="0" i="0">
+              <a:rPr sz="1800" b="0" i="0">
                 <a:solidFill>
                   <a:srgbClr val="2C3E50"/>
                 </a:solidFill>
@@ -7341,7 +7356,7 @@
               </a:spcAft>
             </a:pPr>
             <a:r>
-              <a:rPr sz="1600" b="0" i="0">
+              <a:rPr sz="1800" b="0" i="0">
                 <a:solidFill>
                   <a:srgbClr val="2C3E50"/>
                 </a:solidFill>
@@ -7469,7 +7484,7 @@
               </a:spcAft>
             </a:pPr>
             <a:r>
-              <a:rPr sz="1600" b="0" i="0">
+              <a:rPr sz="1800" b="0" i="0">
                 <a:solidFill>
                   <a:srgbClr val="2C3E50"/>
                 </a:solidFill>
@@ -7628,8 +7643,8 @@
         </p:blipFill>
         <p:spPr>
           <a:xfrm>
-            <a:off x="548640" y="1347881"/>
-            <a:ext cx="11064240" cy="4025077"/>
+            <a:off x="548640" y="1322270"/>
+            <a:ext cx="11064240" cy="4076298"/>
           </a:xfrm>
           <a:prstGeom prst="rect">
             <a:avLst/>
@@ -7664,7 +7679,7 @@
               </a:spcAft>
             </a:pPr>
             <a:r>
-              <a:rPr sz="1600" b="1" i="0">
+              <a:rPr sz="1800" b="1" i="0">
                 <a:solidFill>
                   <a:srgbClr val="1B3A57"/>
                 </a:solidFill>
@@ -7672,7 +7687,7 @@
               <a:t>Vector </a:t>
             </a:r>
             <a:r>
-              <a:rPr sz="1600" b="0" i="0">
+              <a:rPr sz="1800" b="0" i="0">
                 <a:solidFill>
                   <a:srgbClr val="2C3E50"/>
                 </a:solidFill>
@@ -7680,7 +7695,7 @@
               <a:t>models things that have a boundary and an identity. </a:t>
             </a:r>
             <a:r>
-              <a:rPr sz="1600" b="1" i="0">
+              <a:rPr sz="1800" b="1" i="0">
                 <a:solidFill>
                   <a:srgbClr val="1B3A57"/>
                 </a:solidFill>
@@ -7688,7 +7703,7 @@
               <a:t>Raster </a:t>
             </a:r>
             <a:r>
-              <a:rPr sz="1600" b="0" i="0">
+              <a:rPr sz="1800" b="0" i="0">
                 <a:solidFill>
                   <a:srgbClr val="2C3E50"/>
                 </a:solidFill>
@@ -7707,7 +7722,7 @@
         <p:spPr>
           <a:xfrm>
             <a:off x="548640" y="6053328"/>
-            <a:ext cx="10058400" cy="274320"/>
+            <a:ext cx="10607040" cy="274320"/>
           </a:xfrm>
           <a:prstGeom prst="rect">
             <a:avLst/>
@@ -7726,7 +7741,7 @@
               </a:spcAft>
             </a:pPr>
             <a:r>
-              <a:rPr sz="1000" b="0" i="0">
+              <a:rPr sz="1100" b="0" i="0">
                 <a:solidFill>
                   <a:srgbClr val="7F8C8D"/>
                 </a:solidFill>
@@ -7898,7 +7913,7 @@
               <a:buChar char="•"/>
             </a:pPr>
             <a:r>
-              <a:rPr sz="1500" b="1" i="0">
+              <a:rPr sz="1800" b="1" i="0">
                 <a:solidFill>
                   <a:srgbClr val="2C3E50"/>
                 </a:solidFill>
@@ -7906,7 +7921,7 @@
               <a:t>Standards: </a:t>
             </a:r>
             <a:r>
-              <a:rPr sz="1500" b="0" i="0">
+              <a:rPr sz="1800" b="0" i="0">
                 <a:solidFill>
                   <a:srgbClr val="2C3E50"/>
                 </a:solidFill>
@@ -7922,7 +7937,7 @@
               <a:buChar char="•"/>
             </a:pPr>
             <a:r>
-              <a:rPr sz="1500" b="1" i="0">
+              <a:rPr sz="1800" b="1" i="0">
                 <a:solidFill>
                   <a:srgbClr val="2C3E50"/>
                 </a:solidFill>
@@ -7930,7 +7945,7 @@
               <a:t>Data: </a:t>
             </a:r>
             <a:r>
-              <a:rPr sz="1500" b="0" i="0">
+              <a:rPr sz="1800" b="0" i="0">
                 <a:solidFill>
                   <a:srgbClr val="2C3E50"/>
                 </a:solidFill>
@@ -7946,7 +7961,7 @@
               <a:buChar char="•"/>
             </a:pPr>
             <a:r>
-              <a:rPr sz="1500" b="1" i="0">
+              <a:rPr sz="1800" b="1" i="0">
                 <a:solidFill>
                   <a:srgbClr val="2C3E50"/>
                 </a:solidFill>
@@ -7954,7 +7969,7 @@
               <a:t>Further reading (links): </a:t>
             </a:r>
             <a:r>
-              <a:rPr sz="1500" b="0" i="0">
+              <a:rPr sz="1800" b="0" i="0">
                 <a:solidFill>
                   <a:srgbClr val="2C3E50"/>
                 </a:solidFill>
@@ -7970,7 +7985,7 @@
               <a:buChar char="•"/>
             </a:pPr>
             <a:r>
-              <a:rPr sz="1500" b="1" i="0">
+              <a:rPr sz="1800" b="1" i="0">
                 <a:solidFill>
                   <a:srgbClr val="2C3E50"/>
                 </a:solidFill>
@@ -7978,7 +7993,7 @@
               <a:t>Figures: </a:t>
             </a:r>
             <a:r>
-              <a:rPr sz="1500" b="0" i="0">
+              <a:rPr sz="1800" b="0" i="0">
                 <a:solidFill>
                   <a:srgbClr val="2C3E50"/>
                 </a:solidFill>
@@ -8137,8 +8152,8 @@
         </p:blipFill>
         <p:spPr>
           <a:xfrm>
-            <a:off x="548640" y="1202326"/>
-            <a:ext cx="11064240" cy="3127466"/>
+            <a:off x="931346" y="1097280"/>
+            <a:ext cx="10298827" cy="2834640"/>
           </a:xfrm>
           <a:prstGeom prst="rect">
             <a:avLst/>
@@ -8154,8 +8169,8 @@
           <p:nvPr/>
         </p:nvGraphicFramePr>
         <p:xfrm>
-          <a:off x="548640" y="4480560"/>
-          <a:ext cx="5394960" cy="1243584"/>
+          <a:off x="548640" y="4114800"/>
+          <a:ext cx="5486400" cy="1152144"/>
         </p:xfrm>
         <a:graphic>
           <a:graphicData uri="http://schemas.openxmlformats.org/drawingml/2006/table">
@@ -8164,19 +8179,19 @@
                 <a:tableStyleId>{5C22544A-7EE6-4342-B048-85BDC9FD1C3A}</a:tableStyleId>
               </a:tblPr>
               <a:tblGrid>
-                <a:gridCol w="548640"/>
-                <a:gridCol w="914400"/>
-                <a:gridCol w="2286000"/>
-                <a:gridCol w="1645920"/>
+                <a:gridCol w="640080"/>
+                <a:gridCol w="1188720"/>
+                <a:gridCol w="2194560"/>
+                <a:gridCol w="1463040"/>
               </a:tblGrid>
-              <a:tr h="310896">
+              <a:tr h="384048">
                 <a:tc>
                   <a:txBody>
                     <a:bodyPr wrap="square"/>
                     <a:lstStyle/>
                     <a:p>
                       <a:r>
-                        <a:rPr sz="1200" b="1">
+                        <a:rPr sz="1600" b="1">
                           <a:solidFill>
                             <a:srgbClr val="FFFFFF"/>
                           </a:solidFill>
@@ -8197,7 +8212,7 @@
                     <a:lstStyle/>
                     <a:p>
                       <a:r>
-                        <a:rPr sz="1200" b="1">
+                        <a:rPr sz="1600" b="1">
                           <a:solidFill>
                             <a:srgbClr val="FFFFFF"/>
                           </a:solidFill>
@@ -8218,7 +8233,7 @@
                     <a:lstStyle/>
                     <a:p>
                       <a:r>
-                        <a:rPr sz="1200" b="1">
+                        <a:rPr sz="1600" b="1">
                           <a:solidFill>
                             <a:srgbClr val="FFFFFF"/>
                           </a:solidFill>
@@ -8239,7 +8254,7 @@
                     <a:lstStyle/>
                     <a:p>
                       <a:r>
-                        <a:rPr sz="1200" b="1">
+                        <a:rPr sz="1600" b="1">
                           <a:solidFill>
                             <a:srgbClr val="FFFFFF"/>
                           </a:solidFill>
@@ -8255,14 +8270,14 @@
                   </a:tcPr>
                 </a:tc>
               </a:tr>
-              <a:tr h="310896">
+              <a:tr h="384048">
                 <a:tc>
                   <a:txBody>
                     <a:bodyPr wrap="square"/>
                     <a:lstStyle/>
                     <a:p>
                       <a:r>
-                        <a:rPr sz="1200" b="1">
+                        <a:rPr sz="1600" b="1">
                           <a:solidFill>
                             <a:srgbClr val="2C3E50"/>
                           </a:solidFill>
@@ -8283,7 +8298,7 @@
                     <a:lstStyle/>
                     <a:p>
                       <a:r>
-                        <a:rPr sz="1200" b="0">
+                        <a:rPr sz="1600" b="0">
                           <a:solidFill>
                             <a:srgbClr val="2C3E50"/>
                           </a:solidFill>
@@ -8304,12 +8319,12 @@
                     <a:lstStyle/>
                     <a:p>
                       <a:r>
-                        <a:rPr sz="1200" b="0">
+                        <a:rPr sz="1600" b="0">
                           <a:solidFill>
                             <a:srgbClr val="2C3E50"/>
                           </a:solidFill>
                         </a:rPr>
-                        <a:t>Freie evangelische Gemeinde Hoerstgen</a:t>
+                        <a:t>Freie evangelische G…</a:t>
                       </a:r>
                     </a:p>
                   </a:txBody>
@@ -8325,12 +8340,12 @@
                     <a:lstStyle/>
                     <a:p>
                       <a:r>
-                        <a:rPr sz="1200" b="0">
+                        <a:rPr sz="1600" b="0">
                           <a:solidFill>
                             <a:srgbClr val="2C3E50"/>
                           </a:solidFill>
                         </a:rPr>
-                        <a:t>POLYGON ((324623 …))</a:t>
+                        <a:t>POLYGON (…)</a:t>
                       </a:r>
                     </a:p>
                   </a:txBody>
@@ -8341,14 +8356,14 @@
                   </a:tcPr>
                 </a:tc>
               </a:tr>
-              <a:tr h="310896">
+              <a:tr h="384048">
                 <a:tc>
                   <a:txBody>
                     <a:bodyPr wrap="square"/>
                     <a:lstStyle/>
                     <a:p>
                       <a:r>
-                        <a:rPr sz="1200" b="1">
+                        <a:rPr sz="1600" b="1">
                           <a:solidFill>
                             <a:srgbClr val="2C3E50"/>
                           </a:solidFill>
@@ -8369,7 +8384,7 @@
                     <a:lstStyle/>
                     <a:p>
                       <a:r>
-                        <a:rPr sz="1200" b="0">
+                        <a:rPr sz="1600" b="0">
                           <a:solidFill>
                             <a:srgbClr val="2C3E50"/>
                           </a:solidFill>
@@ -8390,7 +8405,7 @@
                     <a:lstStyle/>
                     <a:p>
                       <a:r>
-                        <a:rPr sz="1200" b="0">
+                        <a:rPr sz="1600" b="0">
                           <a:solidFill>
                             <a:srgbClr val="2C3E50"/>
                           </a:solidFill>
@@ -8411,12 +8426,12 @@
                     <a:lstStyle/>
                     <a:p>
                       <a:r>
-                        <a:rPr sz="1200" b="0">
+                        <a:rPr sz="1600" b="0">
                           <a:solidFill>
                             <a:srgbClr val="2C3E50"/>
                           </a:solidFill>
                         </a:rPr>
-                        <a:t>POLYGON ((324889 …))</a:t>
+                        <a:t>POLYGON (…)</a:t>
                       </a:r>
                     </a:p>
                   </a:txBody>
@@ -8427,92 +8442,6 @@
                   </a:tcPr>
                 </a:tc>
               </a:tr>
-              <a:tr h="310896">
-                <a:tc>
-                  <a:txBody>
-                    <a:bodyPr wrap="square"/>
-                    <a:lstStyle/>
-                    <a:p>
-                      <a:r>
-                        <a:rPr sz="1200" b="1">
-                          <a:solidFill>
-                            <a:srgbClr val="2C3E50"/>
-                          </a:solidFill>
-                        </a:rPr>
-                        <a:t>…</a:t>
-                      </a:r>
-                    </a:p>
-                  </a:txBody>
-                  <a:tcPr marL="73152" marR="73152" marT="27432" marB="27432" anchor="ctr">
-                    <a:solidFill>
-                      <a:srgbClr val="FFFFFF"/>
-                    </a:solidFill>
-                  </a:tcPr>
-                </a:tc>
-                <a:tc>
-                  <a:txBody>
-                    <a:bodyPr wrap="square"/>
-                    <a:lstStyle/>
-                    <a:p>
-                      <a:r>
-                        <a:rPr sz="1200" b="0">
-                          <a:solidFill>
-                            <a:srgbClr val="2C3E50"/>
-                          </a:solidFill>
-                        </a:rPr>
-                        <a:t>…</a:t>
-                      </a:r>
-                    </a:p>
-                  </a:txBody>
-                  <a:tcPr marL="73152" marR="73152" marT="27432" marB="27432" anchor="ctr">
-                    <a:solidFill>
-                      <a:srgbClr val="FFFFFF"/>
-                    </a:solidFill>
-                  </a:tcPr>
-                </a:tc>
-                <a:tc>
-                  <a:txBody>
-                    <a:bodyPr wrap="square"/>
-                    <a:lstStyle/>
-                    <a:p>
-                      <a:r>
-                        <a:rPr sz="1200" b="0">
-                          <a:solidFill>
-                            <a:srgbClr val="2C3E50"/>
-                          </a:solidFill>
-                        </a:rPr>
-                        <a:t>…</a:t>
-                      </a:r>
-                    </a:p>
-                  </a:txBody>
-                  <a:tcPr marL="73152" marR="73152" marT="27432" marB="27432" anchor="ctr">
-                    <a:solidFill>
-                      <a:srgbClr val="FFFFFF"/>
-                    </a:solidFill>
-                  </a:tcPr>
-                </a:tc>
-                <a:tc>
-                  <a:txBody>
-                    <a:bodyPr wrap="square"/>
-                    <a:lstStyle/>
-                    <a:p>
-                      <a:r>
-                        <a:rPr sz="1200" b="0">
-                          <a:solidFill>
-                            <a:srgbClr val="2C3E50"/>
-                          </a:solidFill>
-                        </a:rPr>
-                        <a:t>…</a:t>
-                      </a:r>
-                    </a:p>
-                  </a:txBody>
-                  <a:tcPr marL="73152" marR="73152" marT="27432" marB="27432" anchor="ctr">
-                    <a:solidFill>
-                      <a:srgbClr val="FFFFFF"/>
-                    </a:solidFill>
-                  </a:tcPr>
-                </a:tc>
-              </a:tr>
             </a:tbl>
           </a:graphicData>
         </a:graphic>
@@ -8525,8 +8454,8 @@
         </p:nvSpPr>
         <p:spPr>
           <a:xfrm>
-            <a:off x="6172200" y="4480560"/>
-            <a:ext cx="5440680" cy="1371600"/>
+            <a:off x="6263640" y="4114800"/>
+            <a:ext cx="5349240" cy="1783080"/>
           </a:xfrm>
           <a:prstGeom prst="rect">
             <a:avLst/>
@@ -8559,7 +8488,7 @@
           <a:p>
             <a:pPr algn="l"/>
             <a:r>
-              <a:rPr sz="1400" b="1">
+              <a:rPr sz="1700" b="1">
                 <a:solidFill>
                   <a:srgbClr val="2980B9"/>
                 </a:solidFill>
@@ -8574,12 +8503,12 @@
               </a:spcBef>
             </a:pPr>
             <a:r>
-              <a:rPr sz="1300" b="0">
+              <a:rPr sz="1600" b="0">
                 <a:solidFill>
                   <a:srgbClr val="2C3E50"/>
                 </a:solidFill>
               </a:rPr>
-              <a:t>Layer → Add Layer → Add Vector Layer… (GeoPackage, layer buildings)</a:t>
+              <a:t>Layer → Add Layer → Add Vector Layer</a:t>
             </a:r>
           </a:p>
           <a:p>
@@ -8589,12 +8518,12 @@
               </a:spcBef>
             </a:pPr>
             <a:r>
-              <a:rPr sz="1300" b="0">
+              <a:rPr sz="1600" b="0">
                 <a:solidFill>
                   <a:srgbClr val="2C3E50"/>
                 </a:solidFill>
               </a:rPr>
-              <a:t>Right-click the layer → Open Attribute Table: one row per feature</a:t>
+              <a:t>Right-click → Open Attribute Table</a:t>
             </a:r>
           </a:p>
           <a:p>
@@ -8604,12 +8533,12 @@
               </a:spcBef>
             </a:pPr>
             <a:r>
-              <a:rPr sz="1300" b="0">
+              <a:rPr sz="1600" b="0">
                 <a:solidFill>
                   <a:srgbClr val="2C3E50"/>
                 </a:solidFill>
               </a:rPr>
-              <a:t>Identify Features (Ctrl+Shift+I): click a building, see its row</a:t>
+              <a:t>Identify Features: click a building</a:t>
             </a:r>
           </a:p>
         </p:txBody>
@@ -8623,7 +8552,7 @@
         <p:spPr>
           <a:xfrm>
             <a:off x="548640" y="6053328"/>
-            <a:ext cx="10058400" cy="274320"/>
+            <a:ext cx="10607040" cy="274320"/>
           </a:xfrm>
           <a:prstGeom prst="rect">
             <a:avLst/>
@@ -8642,7 +8571,7 @@
               </a:spcAft>
             </a:pPr>
             <a:r>
-              <a:rPr sz="1000" b="0" i="0">
+              <a:rPr sz="1100" b="0" i="0">
                 <a:solidFill>
                   <a:srgbClr val="7F8C8D"/>
                 </a:solidFill>
@@ -8801,8 +8730,8 @@
         </p:blipFill>
         <p:spPr>
           <a:xfrm>
-            <a:off x="893579" y="1188720"/>
-            <a:ext cx="5162281" cy="4754880"/>
+            <a:off x="913615" y="1188720"/>
+            <a:ext cx="5122209" cy="4754880"/>
           </a:xfrm>
           <a:prstGeom prst="rect">
             <a:avLst/>
@@ -8833,12 +8762,12 @@
           <a:p>
             <a:pPr algn="l" marL="256032" indent="-228600">
               <a:spcAft>
-                <a:spcPts val="800"/>
+                <a:spcPts val="600"/>
               </a:spcAft>
               <a:buChar char="•"/>
             </a:pPr>
             <a:r>
-              <a:rPr sz="1600" b="1" i="0">
+              <a:rPr sz="1800" b="1" i="0">
                 <a:solidFill>
                   <a:srgbClr val="2C3E50"/>
                 </a:solidFill>
@@ -8846,7 +8775,7 @@
               <a:t>Grid: </a:t>
             </a:r>
             <a:r>
-              <a:rPr sz="1600" b="0" i="0">
+              <a:rPr sz="1800" b="0" i="0">
                 <a:solidFill>
                   <a:srgbClr val="2C3E50"/>
                 </a:solidFill>
@@ -8857,12 +8786,12 @@
           <a:p>
             <a:pPr algn="l" marL="256032" indent="-228600">
               <a:spcAft>
-                <a:spcPts val="800"/>
+                <a:spcPts val="600"/>
               </a:spcAft>
               <a:buChar char="•"/>
             </a:pPr>
             <a:r>
-              <a:rPr sz="1600" b="1" i="0">
+              <a:rPr sz="1800" b="1" i="0">
                 <a:solidFill>
                   <a:srgbClr val="2C3E50"/>
                 </a:solidFill>
@@ -8870,7 +8799,7 @@
               <a:t>Cell size: </a:t>
             </a:r>
             <a:r>
-              <a:rPr sz="1600" b="0" i="0">
+              <a:rPr sz="1800" b="0" i="0">
                 <a:solidFill>
                   <a:srgbClr val="2C3E50"/>
                 </a:solidFill>
@@ -8881,12 +8810,12 @@
           <a:p>
             <a:pPr algn="l" marL="256032" indent="-228600">
               <a:spcAft>
-                <a:spcPts val="800"/>
+                <a:spcPts val="600"/>
               </a:spcAft>
               <a:buChar char="•"/>
             </a:pPr>
             <a:r>
-              <a:rPr sz="1600" b="1" i="0">
+              <a:rPr sz="1800" b="1" i="0">
                 <a:solidFill>
                   <a:srgbClr val="2C3E50"/>
                 </a:solidFill>
@@ -8894,7 +8823,7 @@
               <a:t>Bands: </a:t>
             </a:r>
             <a:r>
-              <a:rPr sz="1600" b="0" i="0">
+              <a:rPr sz="1800" b="0" i="0">
                 <a:solidFill>
                   <a:srgbClr val="2C3E50"/>
                 </a:solidFill>
@@ -8905,12 +8834,12 @@
           <a:p>
             <a:pPr algn="l" marL="256032" indent="-228600">
               <a:spcAft>
-                <a:spcPts val="800"/>
+                <a:spcPts val="600"/>
               </a:spcAft>
               <a:buChar char="•"/>
             </a:pPr>
             <a:r>
-              <a:rPr sz="1600" b="1" i="0">
+              <a:rPr sz="1800" b="1" i="0">
                 <a:solidFill>
                   <a:srgbClr val="2C3E50"/>
                 </a:solidFill>
@@ -8918,7 +8847,7 @@
               <a:t>NoData: </a:t>
             </a:r>
             <a:r>
-              <a:rPr sz="1600" b="0" i="0">
+              <a:rPr sz="1800" b="0" i="0">
                 <a:solidFill>
                   <a:srgbClr val="2C3E50"/>
                 </a:solidFill>
@@ -8929,12 +8858,12 @@
           <a:p>
             <a:pPr algn="l" marL="256032" indent="-228600">
               <a:spcAft>
-                <a:spcPts val="800"/>
+                <a:spcPts val="600"/>
               </a:spcAft>
               <a:buChar char="•"/>
             </a:pPr>
             <a:r>
-              <a:rPr sz="1600" b="1" i="0">
+              <a:rPr sz="1800" b="1" i="0">
                 <a:solidFill>
                   <a:srgbClr val="2C3E50"/>
                 </a:solidFill>
@@ -8942,7 +8871,7 @@
               <a:t>CRS + origin: </a:t>
             </a:r>
             <a:r>
-              <a:rPr sz="1600" b="0" i="0">
+              <a:rPr sz="1800" b="0" i="0">
                 <a:solidFill>
                   <a:srgbClr val="2C3E50"/>
                 </a:solidFill>
@@ -8960,8 +8889,8 @@
         </p:nvSpPr>
         <p:spPr>
           <a:xfrm>
-            <a:off x="6629400" y="3749039"/>
-            <a:ext cx="4983480" cy="2103120"/>
+            <a:off x="6629400" y="3703320"/>
+            <a:ext cx="4983480" cy="2240280"/>
           </a:xfrm>
           <a:prstGeom prst="rect">
             <a:avLst/>
@@ -8994,7 +8923,7 @@
           <a:p>
             <a:pPr algn="l"/>
             <a:r>
-              <a:rPr sz="1400" b="1">
+              <a:rPr sz="1700" b="1">
                 <a:solidFill>
                   <a:srgbClr val="2980B9"/>
                 </a:solidFill>
@@ -9009,12 +8938,12 @@
               </a:spcBef>
             </a:pPr>
             <a:r>
-              <a:rPr sz="1300" b="0">
+              <a:rPr sz="1600" b="0">
                 <a:solidFill>
                   <a:srgbClr val="2C3E50"/>
                 </a:solidFill>
               </a:rPr>
-              <a:t>Layer Properties → Information: width × height (cells), pixel size, CRS, bands, NoData</a:t>
+              <a:t>Layer Properties → Information:</a:t>
             </a:r>
           </a:p>
           <a:p>
@@ -9024,12 +8953,12 @@
               </a:spcBef>
             </a:pPr>
             <a:r>
-              <a:rPr sz="1300" b="0">
+              <a:rPr sz="1600" b="0">
                 <a:solidFill>
                   <a:srgbClr val="2C3E50"/>
                 </a:solidFill>
               </a:rPr>
-              <a:t>Identify Features on a pixel: the value of every band</a:t>
+              <a:t>size, pixel size, CRS, bands, NoData</a:t>
             </a:r>
           </a:p>
           <a:p>
@@ -9039,7 +8968,22 @@
               </a:spcBef>
             </a:pPr>
             <a:r>
-              <a:rPr sz="1300" b="0">
+              <a:rPr sz="1600" b="0">
+                <a:solidFill>
+                  <a:srgbClr val="2C3E50"/>
+                </a:solidFill>
+              </a:rPr>
+              <a:t>Identify Features: values of a pixel</a:t>
+            </a:r>
+          </a:p>
+          <a:p>
+            <a:pPr algn="l">
+              <a:spcBef>
+                <a:spcPts val="300"/>
+              </a:spcBef>
+            </a:pPr>
+            <a:r>
+              <a:rPr sz="1600" b="0">
                 <a:solidFill>
                   <a:srgbClr val="2C3E50"/>
                 </a:solidFill>
@@ -9058,7 +9002,7 @@
         <p:spPr>
           <a:xfrm>
             <a:off x="548640" y="6053328"/>
-            <a:ext cx="10058400" cy="274320"/>
+            <a:ext cx="10607040" cy="274320"/>
           </a:xfrm>
           <a:prstGeom prst="rect">
             <a:avLst/>
@@ -9077,7 +9021,7 @@
               </a:spcAft>
             </a:pPr>
             <a:r>
-              <a:rPr sz="1000" b="0" i="0">
+              <a:rPr sz="1100" b="0" i="0">
                 <a:solidFill>
                   <a:srgbClr val="7F8C8D"/>
                 </a:solidFill>
@@ -9236,8 +9180,8 @@
         </p:blipFill>
         <p:spPr>
           <a:xfrm>
-            <a:off x="1523985" y="1143000"/>
-            <a:ext cx="9113549" cy="4846320"/>
+            <a:off x="548640" y="1425724"/>
+            <a:ext cx="11064240" cy="4280870"/>
           </a:xfrm>
           <a:prstGeom prst="rect">
             <a:avLst/>
@@ -9253,7 +9197,7 @@
         <p:spPr>
           <a:xfrm>
             <a:off x="548640" y="6053328"/>
-            <a:ext cx="10058400" cy="274320"/>
+            <a:ext cx="10607040" cy="274320"/>
           </a:xfrm>
           <a:prstGeom prst="rect">
             <a:avLst/>
@@ -9272,7 +9216,7 @@
               </a:spcAft>
             </a:pPr>
             <a:r>
-              <a:rPr sz="1000" b="0" i="0">
+              <a:rPr sz="1100" b="0" i="0">
                 <a:solidFill>
                   <a:srgbClr val="7F8C8D"/>
                 </a:solidFill>
@@ -9445,7 +9389,7 @@
                     <a:lstStyle/>
                     <a:p>
                       <a:r>
-                        <a:rPr sz="1400" b="1">
+                        <a:rPr sz="1600" b="1">
                           <a:solidFill>
                             <a:srgbClr val="FFFFFF"/>
                           </a:solidFill>
@@ -9466,7 +9410,7 @@
                     <a:lstStyle/>
                     <a:p>
                       <a:r>
-                        <a:rPr sz="1400" b="1">
+                        <a:rPr sz="1600" b="1">
                           <a:solidFill>
                             <a:srgbClr val="FFFFFF"/>
                           </a:solidFill>
@@ -9487,7 +9431,7 @@
                     <a:lstStyle/>
                     <a:p>
                       <a:r>
-                        <a:rPr sz="1400" b="1">
+                        <a:rPr sz="1600" b="1">
                           <a:solidFill>
                             <a:srgbClr val="FFFFFF"/>
                           </a:solidFill>
@@ -9510,7 +9454,7 @@
                     <a:lstStyle/>
                     <a:p>
                       <a:r>
-                        <a:rPr sz="1400" b="1">
+                        <a:rPr sz="1600" b="1">
                           <a:solidFill>
                             <a:srgbClr val="2C3E50"/>
                           </a:solidFill>
@@ -9531,7 +9475,7 @@
                     <a:lstStyle/>
                     <a:p>
                       <a:r>
-                        <a:rPr sz="1400" b="0">
+                        <a:rPr sz="1600" b="0">
                           <a:solidFill>
                             <a:srgbClr val="2C3E50"/>
                           </a:solidFill>
@@ -9552,7 +9496,7 @@
                     <a:lstStyle/>
                     <a:p>
                       <a:r>
-                        <a:rPr sz="1400" b="0">
+                        <a:rPr sz="1600" b="0">
                           <a:solidFill>
                             <a:srgbClr val="2C3E50"/>
                           </a:solidFill>
@@ -9575,7 +9519,7 @@
                     <a:lstStyle/>
                     <a:p>
                       <a:r>
-                        <a:rPr sz="1400" b="1">
+                        <a:rPr sz="1600" b="1">
                           <a:solidFill>
                             <a:srgbClr val="2C3E50"/>
                           </a:solidFill>
@@ -9596,7 +9540,7 @@
                     <a:lstStyle/>
                     <a:p>
                       <a:r>
-                        <a:rPr sz="1400" b="0">
+                        <a:rPr sz="1600" b="0">
                           <a:solidFill>
                             <a:srgbClr val="2C3E50"/>
                           </a:solidFill>
@@ -9617,7 +9561,7 @@
                     <a:lstStyle/>
                     <a:p>
                       <a:r>
-                        <a:rPr sz="1400" b="0">
+                        <a:rPr sz="1600" b="0">
                           <a:solidFill>
                             <a:srgbClr val="2C3E50"/>
                           </a:solidFill>
@@ -9640,7 +9584,7 @@
                     <a:lstStyle/>
                     <a:p>
                       <a:r>
-                        <a:rPr sz="1400" b="1">
+                        <a:rPr sz="1600" b="1">
                           <a:solidFill>
                             <a:srgbClr val="2C3E50"/>
                           </a:solidFill>
@@ -9661,7 +9605,7 @@
                     <a:lstStyle/>
                     <a:p>
                       <a:r>
-                        <a:rPr sz="1400" b="0">
+                        <a:rPr sz="1600" b="0">
                           <a:solidFill>
                             <a:srgbClr val="2C3E50"/>
                           </a:solidFill>
@@ -9682,7 +9626,7 @@
                     <a:lstStyle/>
                     <a:p>
                       <a:r>
-                        <a:rPr sz="1400" b="0">
+                        <a:rPr sz="1600" b="0">
                           <a:solidFill>
                             <a:srgbClr val="2C3E50"/>
                           </a:solidFill>
@@ -9705,7 +9649,7 @@
                     <a:lstStyle/>
                     <a:p>
                       <a:r>
-                        <a:rPr sz="1400" b="1">
+                        <a:rPr sz="1600" b="1">
                           <a:solidFill>
                             <a:srgbClr val="2C3E50"/>
                           </a:solidFill>
@@ -9726,7 +9670,7 @@
                     <a:lstStyle/>
                     <a:p>
                       <a:r>
-                        <a:rPr sz="1400" b="0">
+                        <a:rPr sz="1600" b="0">
                           <a:solidFill>
                             <a:srgbClr val="2C3E50"/>
                           </a:solidFill>
@@ -9747,7 +9691,7 @@
                     <a:lstStyle/>
                     <a:p>
                       <a:r>
-                        <a:rPr sz="1400" b="0">
+                        <a:rPr sz="1600" b="0">
                           <a:solidFill>
                             <a:srgbClr val="2C3E50"/>
                           </a:solidFill>
@@ -9770,7 +9714,7 @@
                     <a:lstStyle/>
                     <a:p>
                       <a:r>
-                        <a:rPr sz="1400" b="1">
+                        <a:rPr sz="1600" b="1">
                           <a:solidFill>
                             <a:srgbClr val="2C3E50"/>
                           </a:solidFill>
@@ -9791,7 +9735,7 @@
                     <a:lstStyle/>
                     <a:p>
                       <a:r>
-                        <a:rPr sz="1400" b="0">
+                        <a:rPr sz="1600" b="0">
                           <a:solidFill>
                             <a:srgbClr val="2C3E50"/>
                           </a:solidFill>
@@ -9812,7 +9756,7 @@
                     <a:lstStyle/>
                     <a:p>
                       <a:r>
-                        <a:rPr sz="1400" b="0">
+                        <a:rPr sz="1600" b="0">
                           <a:solidFill>
                             <a:srgbClr val="2C3E50"/>
                           </a:solidFill>
@@ -9835,7 +9779,7 @@
                     <a:lstStyle/>
                     <a:p>
                       <a:r>
-                        <a:rPr sz="1400" b="1">
+                        <a:rPr sz="1600" b="1">
                           <a:solidFill>
                             <a:srgbClr val="2C3E50"/>
                           </a:solidFill>
@@ -9856,7 +9800,7 @@
                     <a:lstStyle/>
                     <a:p>
                       <a:r>
-                        <a:rPr sz="1400" b="0">
+                        <a:rPr sz="1600" b="0">
                           <a:solidFill>
                             <a:srgbClr val="2C3E50"/>
                           </a:solidFill>
@@ -9877,7 +9821,7 @@
                     <a:lstStyle/>
                     <a:p>
                       <a:r>
-                        <a:rPr sz="1400" b="0">
+                        <a:rPr sz="1600" b="0">
                           <a:solidFill>
                             <a:srgbClr val="2C3E50"/>
                           </a:solidFill>
@@ -9900,7 +9844,7 @@
                     <a:lstStyle/>
                     <a:p>
                       <a:r>
-                        <a:rPr sz="1400" b="1">
+                        <a:rPr sz="1600" b="1">
                           <a:solidFill>
                             <a:srgbClr val="2C3E50"/>
                           </a:solidFill>
@@ -9921,7 +9865,7 @@
                     <a:lstStyle/>
                     <a:p>
                       <a:r>
-                        <a:rPr sz="1400" b="0">
+                        <a:rPr sz="1600" b="0">
                           <a:solidFill>
                             <a:srgbClr val="2C3E50"/>
                           </a:solidFill>
@@ -9942,7 +9886,7 @@
                     <a:lstStyle/>
                     <a:p>
                       <a:r>
-                        <a:rPr sz="1400" b="0">
+                        <a:rPr sz="1600" b="0">
                           <a:solidFill>
                             <a:srgbClr val="2C3E50"/>
                           </a:solidFill>
@@ -10105,7 +10049,7 @@
         </p:nvGraphicFramePr>
         <p:xfrm>
           <a:off x="548640" y="1280160"/>
-          <a:ext cx="11064240" cy="3968496"/>
+          <a:ext cx="11064240" cy="3840480"/>
         </p:xfrm>
         <a:graphic>
           <a:graphicData uri="http://schemas.openxmlformats.org/drawingml/2006/table">
@@ -10114,19 +10058,19 @@
                 <a:tableStyleId>{5C22544A-7EE6-4342-B048-85BDC9FD1C3A}</a:tableStyleId>
               </a:tblPr>
               <a:tblGrid>
+                <a:gridCol w="2377440"/>
+                <a:gridCol w="1645920"/>
                 <a:gridCol w="2286000"/>
-                <a:gridCol w="1554480"/>
-                <a:gridCol w="2377440"/>
-                <a:gridCol w="4846320"/>
+                <a:gridCol w="4754880"/>
               </a:tblGrid>
-              <a:tr h="566928">
+              <a:tr h="548640">
                 <a:tc>
                   <a:txBody>
                     <a:bodyPr wrap="square"/>
                     <a:lstStyle/>
                     <a:p>
                       <a:r>
-                        <a:rPr sz="1300" b="1">
+                        <a:rPr sz="1600" b="1">
                           <a:solidFill>
                             <a:srgbClr val="FFFFFF"/>
                           </a:solidFill>
@@ -10147,7 +10091,7 @@
                     <a:lstStyle/>
                     <a:p>
                       <a:r>
-                        <a:rPr sz="1300" b="1">
+                        <a:rPr sz="1600" b="1">
                           <a:solidFill>
                             <a:srgbClr val="FFFFFF"/>
                           </a:solidFill>
@@ -10168,7 +10112,7 @@
                     <a:lstStyle/>
                     <a:p>
                       <a:r>
-                        <a:rPr sz="1300" b="1">
+                        <a:rPr sz="1600" b="1">
                           <a:solidFill>
                             <a:srgbClr val="FFFFFF"/>
                           </a:solidFill>
@@ -10189,7 +10133,7 @@
                     <a:lstStyle/>
                     <a:p>
                       <a:r>
-                        <a:rPr sz="1300" b="1">
+                        <a:rPr sz="1600" b="1">
                           <a:solidFill>
                             <a:srgbClr val="FFFFFF"/>
                           </a:solidFill>
@@ -10205,14 +10149,14 @@
                   </a:tcPr>
                 </a:tc>
               </a:tr>
-              <a:tr h="566928">
+              <a:tr h="548640">
                 <a:tc>
                   <a:txBody>
                     <a:bodyPr wrap="square"/>
                     <a:lstStyle/>
                     <a:p>
                       <a:r>
-                        <a:rPr sz="1300" b="1">
+                        <a:rPr sz="1600" b="1">
                           <a:solidFill>
                             <a:srgbClr val="2C3E50"/>
                           </a:solidFill>
@@ -10233,7 +10177,7 @@
                     <a:lstStyle/>
                     <a:p>
                       <a:r>
-                        <a:rPr sz="1300" b="0">
+                        <a:rPr sz="1600" b="0">
                           <a:solidFill>
                             <a:srgbClr val="2C3E50"/>
                           </a:solidFill>
@@ -10254,7 +10198,7 @@
                     <a:lstStyle/>
                     <a:p>
                       <a:r>
-                        <a:rPr sz="1300" b="0">
+                        <a:rPr sz="1600" b="0">
                           <a:solidFill>
                             <a:srgbClr val="2C3E50"/>
                           </a:solidFill>
@@ -10275,7 +10219,7 @@
                     <a:lstStyle/>
                     <a:p>
                       <a:r>
-                        <a:rPr sz="1300" b="0">
+                        <a:rPr sz="1600" b="0">
                           <a:solidFill>
                             <a:srgbClr val="2C3E50"/>
                           </a:solidFill>
@@ -10291,14 +10235,14 @@
                   </a:tcPr>
                 </a:tc>
               </a:tr>
-              <a:tr h="566928">
+              <a:tr h="548640">
                 <a:tc>
                   <a:txBody>
                     <a:bodyPr wrap="square"/>
                     <a:lstStyle/>
                     <a:p>
                       <a:r>
-                        <a:rPr sz="1300" b="1">
+                        <a:rPr sz="1600" b="1">
                           <a:solidFill>
                             <a:srgbClr val="2C3E50"/>
                           </a:solidFill>
@@ -10319,7 +10263,7 @@
                     <a:lstStyle/>
                     <a:p>
                       <a:r>
-                        <a:rPr sz="1300" b="0">
+                        <a:rPr sz="1600" b="0">
                           <a:solidFill>
                             <a:srgbClr val="2C3E50"/>
                           </a:solidFill>
@@ -10340,7 +10284,7 @@
                     <a:lstStyle/>
                     <a:p>
                       <a:r>
-                        <a:rPr sz="1300" b="0">
+                        <a:rPr sz="1600" b="0">
                           <a:solidFill>
                             <a:srgbClr val="2C3E50"/>
                           </a:solidFill>
@@ -10361,7 +10305,7 @@
                     <a:lstStyle/>
                     <a:p>
                       <a:r>
-                        <a:rPr sz="1300" b="0">
+                        <a:rPr sz="1600" b="0">
                           <a:solidFill>
                             <a:srgbClr val="2C3E50"/>
                           </a:solidFill>
@@ -10377,14 +10321,14 @@
                   </a:tcPr>
                 </a:tc>
               </a:tr>
-              <a:tr h="566928">
+              <a:tr h="548640">
                 <a:tc>
                   <a:txBody>
                     <a:bodyPr wrap="square"/>
                     <a:lstStyle/>
                     <a:p>
                       <a:r>
-                        <a:rPr sz="1300" b="1">
+                        <a:rPr sz="1600" b="1">
                           <a:solidFill>
                             <a:srgbClr val="2C3E50"/>
                           </a:solidFill>
@@ -10405,7 +10349,7 @@
                     <a:lstStyle/>
                     <a:p>
                       <a:r>
-                        <a:rPr sz="1300" b="0">
+                        <a:rPr sz="1600" b="0">
                           <a:solidFill>
                             <a:srgbClr val="2C3E50"/>
                           </a:solidFill>
@@ -10426,7 +10370,7 @@
                     <a:lstStyle/>
                     <a:p>
                       <a:r>
-                        <a:rPr sz="1300" b="0">
+                        <a:rPr sz="1600" b="0">
                           <a:solidFill>
                             <a:srgbClr val="2C3E50"/>
                           </a:solidFill>
@@ -10447,7 +10391,7 @@
                     <a:lstStyle/>
                     <a:p>
                       <a:r>
-                        <a:rPr sz="1300" b="0">
+                        <a:rPr sz="1600" b="0">
                           <a:solidFill>
                             <a:srgbClr val="2C3E50"/>
                           </a:solidFill>
@@ -10463,14 +10407,14 @@
                   </a:tcPr>
                 </a:tc>
               </a:tr>
-              <a:tr h="566928">
+              <a:tr h="548640">
                 <a:tc>
                   <a:txBody>
                     <a:bodyPr wrap="square"/>
                     <a:lstStyle/>
                     <a:p>
                       <a:r>
-                        <a:rPr sz="1300" b="1">
+                        <a:rPr sz="1600" b="1">
                           <a:solidFill>
                             <a:srgbClr val="2C3E50"/>
                           </a:solidFill>
@@ -10491,7 +10435,7 @@
                     <a:lstStyle/>
                     <a:p>
                       <a:r>
-                        <a:rPr sz="1300" b="0">
+                        <a:rPr sz="1600" b="0">
                           <a:solidFill>
                             <a:srgbClr val="2C3E50"/>
                           </a:solidFill>
@@ -10512,7 +10456,7 @@
                     <a:lstStyle/>
                     <a:p>
                       <a:r>
-                        <a:rPr sz="1300" b="0">
+                        <a:rPr sz="1600" b="0">
                           <a:solidFill>
                             <a:srgbClr val="2C3E50"/>
                           </a:solidFill>
@@ -10533,7 +10477,7 @@
                     <a:lstStyle/>
                     <a:p>
                       <a:r>
-                        <a:rPr sz="1300" b="0">
+                        <a:rPr sz="1600" b="0">
                           <a:solidFill>
                             <a:srgbClr val="2C3E50"/>
                           </a:solidFill>
@@ -10549,14 +10493,14 @@
                   </a:tcPr>
                 </a:tc>
               </a:tr>
-              <a:tr h="566928">
+              <a:tr h="548640">
                 <a:tc>
                   <a:txBody>
                     <a:bodyPr wrap="square"/>
                     <a:lstStyle/>
                     <a:p>
                       <a:r>
-                        <a:rPr sz="1300" b="1">
+                        <a:rPr sz="1600" b="1">
                           <a:solidFill>
                             <a:srgbClr val="2C3E50"/>
                           </a:solidFill>
@@ -10577,7 +10521,7 @@
                     <a:lstStyle/>
                     <a:p>
                       <a:r>
-                        <a:rPr sz="1300" b="0">
+                        <a:rPr sz="1600" b="0">
                           <a:solidFill>
                             <a:srgbClr val="2C3E50"/>
                           </a:solidFill>
@@ -10598,7 +10542,7 @@
                     <a:lstStyle/>
                     <a:p>
                       <a:r>
-                        <a:rPr sz="1300" b="0">
+                        <a:rPr sz="1600" b="0">
                           <a:solidFill>
                             <a:srgbClr val="2C3E50"/>
                           </a:solidFill>
@@ -10619,7 +10563,7 @@
                     <a:lstStyle/>
                     <a:p>
                       <a:r>
-                        <a:rPr sz="1300" b="0">
+                        <a:rPr sz="1600" b="0">
                           <a:solidFill>
                             <a:srgbClr val="2C3E50"/>
                           </a:solidFill>
@@ -10635,14 +10579,14 @@
                   </a:tcPr>
                 </a:tc>
               </a:tr>
-              <a:tr h="566928">
+              <a:tr h="548640">
                 <a:tc>
                   <a:txBody>
                     <a:bodyPr wrap="square"/>
                     <a:lstStyle/>
                     <a:p>
                       <a:r>
-                        <a:rPr sz="1300" b="1">
+                        <a:rPr sz="1600" b="1">
                           <a:solidFill>
                             <a:srgbClr val="2C3E50"/>
                           </a:solidFill>
@@ -10663,7 +10607,7 @@
                     <a:lstStyle/>
                     <a:p>
                       <a:r>
-                        <a:rPr sz="1300" b="0">
+                        <a:rPr sz="1600" b="0">
                           <a:solidFill>
                             <a:srgbClr val="2C3E50"/>
                           </a:solidFill>
@@ -10684,7 +10628,7 @@
                     <a:lstStyle/>
                     <a:p>
                       <a:r>
-                        <a:rPr sz="1300" b="0">
+                        <a:rPr sz="1600" b="0">
                           <a:solidFill>
                             <a:srgbClr val="2C3E50"/>
                           </a:solidFill>
@@ -10705,7 +10649,7 @@
                     <a:lstStyle/>
                     <a:p>
                       <a:r>
-                        <a:rPr sz="1300" b="0">
+                        <a:rPr sz="1600" b="0">
                           <a:solidFill>
                             <a:srgbClr val="2C3E50"/>
                           </a:solidFill>
@@ -10733,8 +10677,8 @@
         </p:nvSpPr>
         <p:spPr>
           <a:xfrm>
-            <a:off x="548640" y="5486400"/>
-            <a:ext cx="11064240" cy="457200"/>
+            <a:off x="548640" y="5349240"/>
+            <a:ext cx="11064240" cy="640080"/>
           </a:xfrm>
           <a:prstGeom prst="rect">
             <a:avLst/>
@@ -10753,7 +10697,7 @@
               </a:spcAft>
             </a:pPr>
             <a:r>
-              <a:rPr sz="1400" b="1" i="0">
+              <a:rPr sz="1800" b="1" i="0">
                 <a:solidFill>
                   <a:srgbClr val="1B3A57"/>
                 </a:solidFill>
@@ -10761,7 +10705,7 @@
               <a:t>Rule of thumb: </a:t>
             </a:r>
             <a:r>
-              <a:rPr sz="1400" b="0" i="0">
+              <a:rPr sz="1800" b="0" i="0">
                 <a:solidFill>
                   <a:srgbClr val="2C3E50"/>
                 </a:solidFill>
